--- a/public/level3/downloads/slides/Level3_Lesson2_Slides.pptx
+++ b/public/level3/downloads/slides/Level3_Lesson2_Slides.pptx
@@ -1106,7 +1106,7 @@
           </a:p>
           <a:p>
             <a:r>
-              <a:t>The audio (about 1:20) is coming soon. When it is ready, it plays the conversation once; press play again for play 2. Until then, read the listening script (at the end of these notes) with a volunteer.</a:t>
+              <a:t>The audio (L3_L2_listening.mp3, about 1:28) plays the conversation once. Press play again for play 2. A third play is fine if the class needs it.</a:t>
             </a:r>
           </a:p>
           <a:p>
@@ -1116,7 +1116,7 @@
           </a:p>
           <a:p>
             <a:r>
-              <a:t>Audio: the listening audio for this lesson (about 1:20) is coming soon. It will use computer-generated voices (Chatterbox TTS cloned from synthetic Kokoro-82M reference clips); no recordings of real people. Until it is ready, read the listening script (in the notes of the Before You Listen slide) with a volunteer. The names and the story are invented.</a:t>
+              <a:t>Audio: synthetic voices, computer-generated (Chatterbox TTS cloned from Kokoro-82M reference clips). No recordings of real people. The names and the story are invented.</a:t>
             </a:r>
           </a:p>
           <a:p>
@@ -1127,106 +1127,6 @@
           <a:p>
             <a:r>
               <a:t>Picture: Twemoji graphics by Twitter, Inc. and other contributors (https://github.com/jdecked/twemoji), CC BY 4.0 (https://creativecommons.org/licenses/by/4.0/); resized and combined, with drawn bodies, glasses, speech bubbles, and labels (images/CREDITS.md).</a:t>
-            </a:r>
-          </a:p>
-          <a:p>
-            <a:r>
-              <a:t>Listening script (the audio is coming soon; until then, read it aloud with a volunteer at a normal, friendly speed):</a:t>
-            </a:r>
-          </a:p>
-          <a:p>
-            <a:r>
-              <a:t>Narrator: Lesson two. Listening. It's Omar's first day at a hotel. His supervisor, Linda, tells him about two coworkers. Listen.</a:t>
-            </a:r>
-          </a:p>
-          <a:p>
-            <a:r>
-              <a:t>Linda: Welcome, Omar! Today you're going to work with Kevin and Nora.</a:t>
-            </a:r>
-          </a:p>
-          <a:p>
-            <a:r>
-              <a:t>Omar: Great. What's Kevin like?</a:t>
-            </a:r>
-          </a:p>
-          <a:p>
-            <a:r>
-              <a:t>Linda: He's very friendly, and he's really funny. Everyone likes him.</a:t>
-            </a:r>
-          </a:p>
-          <a:p>
-            <a:r>
-              <a:t>Omar: What does he look like?</a:t>
-            </a:r>
-          </a:p>
-          <a:p>
-            <a:r>
-              <a:t>Linda: He's tall, and he has a beard and glasses. You can ask him for help.</a:t>
-            </a:r>
-          </a:p>
-          <a:p>
-            <a:r>
-              <a:t>Omar: OK. And who is Nora?</a:t>
-            </a:r>
-          </a:p>
-          <a:p>
-            <a:r>
-              <a:t>Linda: Nora is the short woman with long, straight hair. She's a little shy.</a:t>
-            </a:r>
-          </a:p>
-          <a:p>
-            <a:r>
-              <a:t>Omar: Is she nice?</a:t>
-            </a:r>
-          </a:p>
-          <a:p>
-            <a:r>
-              <a:t>Linda: Yes. She's quiet, but she's really hardworking.</a:t>
-            </a:r>
-          </a:p>
-          <a:p>
-            <a:r>
-              <a:t>Omar: Does she talk a lot?</a:t>
-            </a:r>
-          </a:p>
-          <a:p>
-            <a:r>
-              <a:t>Linda: Not at first. Talk to her, and ask her questions. She's very patient.</a:t>
-            </a:r>
-          </a:p>
-          <a:p>
-            <a:r>
-              <a:t>Omar: Where can I find them?</a:t>
-            </a:r>
-          </a:p>
-          <a:p>
-            <a:r>
-              <a:t>Linda: They're in the laundry room. Come with me. I can introduce you to them.</a:t>
-            </a:r>
-          </a:p>
-          <a:p>
-            <a:r>
-              <a:t>Omar: Is that Kevin? The man with curly hair?</a:t>
-            </a:r>
-          </a:p>
-          <a:p>
-            <a:r>
-              <a:t>Linda: No, that's Sam. He works at the front desk. Kevin is the tall man next to him.</a:t>
-            </a:r>
-          </a:p>
-          <a:p>
-            <a:r>
-              <a:t>Omar: Oh, I see him. He's waving at us.</a:t>
-            </a:r>
-          </a:p>
-          <a:p>
-            <a:r>
-              <a:t>Linda: Let's go and say hi to him.</a:t>
-            </a:r>
-          </a:p>
-          <a:p>
-            <a:r>
-              <a:t>Narrator: That's the end of the listening.</a:t>
             </a:r>
           </a:p>
         </p:txBody>
@@ -2836,7 +2736,7 @@
           </a:p>
           <a:p>
             <a:r>
-              <a:t>Audio: the listening audio for this lesson (about 1:20) is coming soon. It will use computer-generated voices (Chatterbox TTS cloned from synthetic Kokoro-82M reference clips); no recordings of real people. Until it is ready, read the listening script (in the notes of the Before You Listen slide) with a volunteer. The names and the story are invented.</a:t>
+              <a:t>Audio: synthetic voices, computer-generated (Chatterbox TTS cloned from Kokoro-82M reference clips). No recordings of real people. The names and the story are invented.</a:t>
             </a:r>
           </a:p>
           <a:p>
@@ -12492,7 +12392,7 @@
                 <a:ea typeface="Lexend Deca" pitchFamily="34" charset="-122"/>
                 <a:cs typeface="Lexend Deca" pitchFamily="34" charset="-120"/>
               </a:rPr>
-              <a:t>Audio: about 1:20. It plays once.</a:t>
+              <a:t>Audio: about 1:28. It plays once.</a:t>
             </a:r>
             <a:endParaRPr lang="en-US" sz="2200" dirty="0"/>
           </a:p>
@@ -33430,7 +33330,7 @@
                 <a:ea typeface="Lexend Deca" pitchFamily="34" charset="-122"/>
                 <a:cs typeface="Lexend Deca" pitchFamily="34" charset="-120"/>
               </a:rPr>
-              <a:t>Audio (coming soon): synthetic voices made with Chatterbox TTS (MIT License), cloned from short synthetic reference clips made with Kokoro-82M (Apache License 2.0). No recordings of real people. Each file will carry an inaudible Perth watermark marking it as AI-generated. Font: Lexend Deca (OFL 1.1).</a:t>
+              <a:t>Audio: synthetic voices made with Chatterbox TTS (MIT License), cloned from short synthetic reference clips made with Kokoro-82M (Apache License 2.0). No recordings of real people were used. Each file carries an inaudible Perth watermark marking it as AI-generated. Font: Lexend Deca (OFL 1.1).</a:t>
             </a:r>
             <a:endParaRPr lang="en-US" sz="1350" dirty="0" b="0"/>
           </a:p>
